--- a/hs-web/WW05_웹_직군과_개발_생태계.pptx
+++ b/hs-web/WW05_웹_직군과_개발_생태계.pptx
@@ -14754,457 +14754,30 @@
           </a:p>
         </p:txBody>
       </p:sp>
-      <p:sp>
-        <p:nvSpPr>
-          <p:cNvPr id="11" name="deckgen:code"/>
-          <p:cNvSpPr txBox="1"/>
-          <p:nvPr/>
-        </p:nvSpPr>
+      <p:pic>
+        <p:nvPicPr>
+          <p:cNvPr id="11" name="deckgen:code-art" descr="image.png"/>
+          <p:cNvPicPr>
+            <a:picLocks noChangeAspect="1"/>
+          </p:cNvPicPr>
+          <p:nvPr/>
+        </p:nvPicPr>
+        <p:blipFill>
+          <a:blip r:embed="rId2"/>
+          <a:stretch>
+            <a:fillRect/>
+          </a:stretch>
+        </p:blipFill>
         <p:spPr>
           <a:xfrm>
             <a:off x="2038350" y="2552700"/>
-            <a:ext cx="14897100" cy="5105400"/>
-          </a:xfrm>
-          <a:prstGeom prst="rect">
-            <a:avLst/>
-          </a:prstGeom>
-          <a:noFill/>
-        </p:spPr>
-        <p:txBody>
-          <a:bodyPr wrap="none" lIns="0" rIns="0" tIns="0" bIns="0" anchor="t">
-            <a:spAutoFit/>
-          </a:bodyPr>
-          <a:lstStyle/>
-          <a:p>
-            <a:pPr algn="l">
-              <a:lnSpc>
-                <a:spcPct val="115000"/>
-              </a:lnSpc>
-            </a:pPr>
-            <a:r>
-              <a:rPr sz="2025" b="0">
-                <a:solidFill>
-                  <a:srgbClr val="E6EAF2"/>
-                </a:solidFill>
-                <a:latin typeface="나눔고딕코딩"/>
-                <a:ea typeface="나눔고딕코딩"/>
-                <a:cs typeface="나눔고딕코딩"/>
-              </a:rPr>
-              <a:t>[ 지금 여기 ]</a:t>
-            </a:r>
-          </a:p>
-          <a:p>
-            <a:pPr algn="l">
-              <a:lnSpc>
-                <a:spcPct val="115000"/>
-              </a:lnSpc>
-            </a:pPr>
-            <a:r>
-              <a:rPr sz="2025" b="0">
-                <a:solidFill>
-                  <a:srgbClr val="E6EAF2"/>
-                </a:solidFill>
-                <a:latin typeface="나눔고딕코딩"/>
-                <a:ea typeface="나눔고딕코딩"/>
-                <a:cs typeface="나눔고딕코딩"/>
-              </a:rPr>
-              <a:t>HTML</a:t>
-            </a:r>
-            <a:r>
-              <a:rPr sz="2025" b="0">
-                <a:solidFill>
-                  <a:srgbClr val="E6EAF2"/>
-                </a:solidFill>
-                <a:latin typeface="나눔고딕코딩"/>
-                <a:ea typeface="나눔고딕코딩"/>
-                <a:cs typeface="나눔고딕코딩"/>
-              </a:rPr>
-              <a:t> · </a:t>
-            </a:r>
-            <a:r>
-              <a:rPr sz="2025" b="0">
-                <a:solidFill>
-                  <a:srgbClr val="E6EAF2"/>
-                </a:solidFill>
-                <a:latin typeface="나눔고딕코딩"/>
-                <a:ea typeface="나눔고딕코딩"/>
-                <a:cs typeface="나눔고딕코딩"/>
-              </a:rPr>
-              <a:t>CSS</a:t>
-            </a:r>
-            <a:r>
-              <a:rPr sz="2025" b="0">
-                <a:solidFill>
-                  <a:srgbClr val="E6EAF2"/>
-                </a:solidFill>
-                <a:latin typeface="나눔고딕코딩"/>
-                <a:ea typeface="나눔고딕코딩"/>
-                <a:cs typeface="나눔고딕코딩"/>
-              </a:rPr>
-              <a:t> · </a:t>
-            </a:r>
-            <a:r>
-              <a:rPr sz="2025" b="0">
-                <a:solidFill>
-                  <a:srgbClr val="E6EAF2"/>
-                </a:solidFill>
-                <a:latin typeface="나눔고딕코딩"/>
-                <a:ea typeface="나눔고딕코딩"/>
-                <a:cs typeface="나눔고딕코딩"/>
-              </a:rPr>
-              <a:t>JavaScript</a:t>
-            </a:r>
-          </a:p>
-          <a:p>
-            <a:pPr algn="l">
-              <a:lnSpc>
-                <a:spcPct val="115000"/>
-              </a:lnSpc>
-            </a:pPr>
-            <a:r>
-              <a:rPr sz="2025" b="0">
-                <a:solidFill>
-                  <a:srgbClr val="E6EAF2"/>
-                </a:solidFill>
-                <a:latin typeface="나눔고딕코딩"/>
-                <a:ea typeface="나눔고딕코딩"/>
-                <a:cs typeface="나눔고딕코딩"/>
-              </a:rPr>
-              <a:t>        ↓</a:t>
-            </a:r>
-          </a:p>
-          <a:p>
-            <a:pPr algn="l">
-              <a:lnSpc>
-                <a:spcPct val="115000"/>
-              </a:lnSpc>
-            </a:pPr>
-            <a:r>
-              <a:rPr sz="2025" b="0">
-                <a:solidFill>
-                  <a:srgbClr val="E6EAF2"/>
-                </a:solidFill>
-                <a:latin typeface="나눔고딕코딩"/>
-                <a:ea typeface="나눔고딕코딩"/>
-                <a:cs typeface="나눔고딕코딩"/>
-              </a:rPr>
-              <a:t>Git</a:t>
-            </a:r>
-            <a:r>
-              <a:rPr sz="2025" b="0">
-                <a:solidFill>
-                  <a:srgbClr val="E6EAF2"/>
-                </a:solidFill>
-                <a:latin typeface="나눔고딕코딩"/>
-                <a:ea typeface="나눔고딕코딩"/>
-                <a:cs typeface="나눔고딕코딩"/>
-              </a:rPr>
-              <a:t> · </a:t>
-            </a:r>
-            <a:r>
-              <a:rPr sz="2025" b="0">
-                <a:solidFill>
-                  <a:srgbClr val="E6EAF2"/>
-                </a:solidFill>
-                <a:latin typeface="나눔고딕코딩"/>
-                <a:ea typeface="나눔고딕코딩"/>
-                <a:cs typeface="나눔고딕코딩"/>
-              </a:rPr>
-              <a:t>GitHub</a:t>
-            </a:r>
-            <a:r>
-              <a:rPr sz="2025" b="0">
-                <a:solidFill>
-                  <a:srgbClr val="E6EAF2"/>
-                </a:solidFill>
-                <a:latin typeface="나눔고딕코딩"/>
-                <a:ea typeface="나눔고딕코딩"/>
-                <a:cs typeface="나눔고딕코딩"/>
-              </a:rPr>
-              <a:t> · 배포           ← 15주차</a:t>
-            </a:r>
-          </a:p>
-          <a:p>
-            <a:pPr algn="l">
-              <a:lnSpc>
-                <a:spcPct val="115000"/>
-              </a:lnSpc>
-            </a:pPr>
-            <a:r>
-              <a:rPr sz="2025" b="0">
-                <a:solidFill>
-                  <a:srgbClr val="E6EAF2"/>
-                </a:solidFill>
-                <a:latin typeface="나눔고딕코딩"/>
-                <a:ea typeface="나눔고딕코딩"/>
-                <a:cs typeface="나눔고딕코딩"/>
-              </a:rPr>
-              <a:t>        ↓</a:t>
-            </a:r>
-          </a:p>
-          <a:p>
-            <a:pPr algn="l">
-              <a:lnSpc>
-                <a:spcPct val="115000"/>
-              </a:lnSpc>
-            </a:pPr>
-            <a:r>
-              <a:rPr sz="2025" b="0">
-                <a:solidFill>
-                  <a:srgbClr val="E6EAF2"/>
-                </a:solidFill>
-                <a:latin typeface="나눔고딕코딩"/>
-                <a:ea typeface="나눔고딕코딩"/>
-                <a:cs typeface="나눔고딕코딩"/>
-              </a:rPr>
-              <a:t>직접 만들어 보기 (아주 중요)     ← 방학</a:t>
-            </a:r>
-          </a:p>
-          <a:p>
-            <a:pPr algn="l">
-              <a:lnSpc>
-                <a:spcPct val="115000"/>
-              </a:lnSpc>
-            </a:pPr>
-            <a:r>
-              <a:rPr sz="2025" b="0">
-                <a:solidFill>
-                  <a:srgbClr val="E6EAF2"/>
-                </a:solidFill>
-                <a:latin typeface="나눔고딕코딩"/>
-                <a:ea typeface="나눔고딕코딩"/>
-                <a:cs typeface="나눔고딕코딩"/>
-              </a:rPr>
-              <a:t>        ↓</a:t>
-            </a:r>
-          </a:p>
-          <a:p>
-            <a:pPr algn="l">
-              <a:lnSpc>
-                <a:spcPct val="115000"/>
-              </a:lnSpc>
-            </a:pPr>
-            <a:r>
-              <a:rPr sz="2025" b="0">
-                <a:solidFill>
-                  <a:srgbClr val="E6EAF2"/>
-                </a:solidFill>
-                <a:latin typeface="나눔고딕코딩"/>
-                <a:ea typeface="나눔고딕코딩"/>
-                <a:cs typeface="나눔고딕코딩"/>
-              </a:rPr>
-              <a:t>React</a:t>
-            </a:r>
-            <a:r>
-              <a:rPr sz="2025" b="0">
-                <a:solidFill>
-                  <a:srgbClr val="E6EAF2"/>
-                </a:solidFill>
-                <a:latin typeface="나눔고딕코딩"/>
-                <a:ea typeface="나눔고딕코딩"/>
-                <a:cs typeface="나눔고딕코딩"/>
-              </a:rPr>
-              <a:t> 또는 </a:t>
-            </a:r>
-            <a:r>
-              <a:rPr sz="2025" b="0">
-                <a:solidFill>
-                  <a:srgbClr val="E6EAF2"/>
-                </a:solidFill>
-                <a:latin typeface="나눔고딕코딩"/>
-                <a:ea typeface="나눔고딕코딩"/>
-                <a:cs typeface="나눔고딕코딩"/>
-              </a:rPr>
-              <a:t>Vue</a:t>
-            </a:r>
-            <a:r>
-              <a:rPr sz="2025" b="0">
-                <a:solidFill>
-                  <a:srgbClr val="E6EAF2"/>
-                </a:solidFill>
-                <a:latin typeface="나눔고딕코딩"/>
-                <a:ea typeface="나눔고딕코딩"/>
-                <a:cs typeface="나눔고딕코딩"/>
-              </a:rPr>
-              <a:t> 하나</a:t>
-            </a:r>
-          </a:p>
-          <a:p>
-            <a:pPr algn="l">
-              <a:lnSpc>
-                <a:spcPct val="115000"/>
-              </a:lnSpc>
-            </a:pPr>
-            <a:r>
-              <a:rPr sz="2025" b="0">
-                <a:solidFill>
-                  <a:srgbClr val="E6EAF2"/>
-                </a:solidFill>
-                <a:latin typeface="나눔고딕코딩"/>
-                <a:ea typeface="나눔고딕코딩"/>
-                <a:cs typeface="나눔고딕코딩"/>
-              </a:rPr>
-              <a:t>        ↓</a:t>
-            </a:r>
-          </a:p>
-          <a:p>
-            <a:pPr algn="l">
-              <a:lnSpc>
-                <a:spcPct val="115000"/>
-              </a:lnSpc>
-            </a:pPr>
-            <a:r>
-              <a:rPr sz="2025" b="0">
-                <a:solidFill>
-                  <a:srgbClr val="E6EAF2"/>
-                </a:solidFill>
-                <a:latin typeface="나눔고딕코딩"/>
-                <a:ea typeface="나눔고딕코딩"/>
-                <a:cs typeface="나눔고딕코딩"/>
-              </a:rPr>
-              <a:t>TypeScript</a:t>
-            </a:r>
-          </a:p>
-          <a:p>
-            <a:pPr algn="l">
-              <a:lnSpc>
-                <a:spcPct val="115000"/>
-              </a:lnSpc>
-            </a:pPr>
-            <a:r>
-              <a:rPr sz="2025" b="0">
-                <a:solidFill>
-                  <a:srgbClr val="E6EAF2"/>
-                </a:solidFill>
-                <a:latin typeface="나눔고딕코딩"/>
-                <a:ea typeface="나눔고딕코딩"/>
-                <a:cs typeface="나눔고딕코딩"/>
-              </a:rPr>
-              <a:t>        ↓</a:t>
-            </a:r>
-          </a:p>
-          <a:p>
-            <a:pPr algn="l">
-              <a:lnSpc>
-                <a:spcPct val="115000"/>
-              </a:lnSpc>
-            </a:pPr>
-            <a:r>
-              <a:rPr sz="2025" b="0">
-                <a:solidFill>
-                  <a:srgbClr val="E6EAF2"/>
-                </a:solidFill>
-                <a:latin typeface="나눔고딕코딩"/>
-                <a:ea typeface="나눔고딕코딩"/>
-                <a:cs typeface="나눔고딕코딩"/>
-              </a:rPr>
-              <a:t>    ┌───┴───┐</a:t>
-            </a:r>
-          </a:p>
-          <a:p>
-            <a:pPr algn="l">
-              <a:lnSpc>
-                <a:spcPct val="115000"/>
-              </a:lnSpc>
-            </a:pPr>
-            <a:r>
-              <a:rPr sz="2025" b="0">
-                <a:solidFill>
-                  <a:srgbClr val="E6EAF2"/>
-                </a:solidFill>
-                <a:latin typeface="나눔고딕코딩"/>
-                <a:ea typeface="나눔고딕코딩"/>
-                <a:cs typeface="나눔고딕코딩"/>
-              </a:rPr>
-              <a:t>프론트 심화   백엔드</a:t>
-            </a:r>
-          </a:p>
-          <a:p>
-            <a:pPr algn="l">
-              <a:lnSpc>
-                <a:spcPct val="115000"/>
-              </a:lnSpc>
-            </a:pPr>
-            <a:r>
-              <a:rPr sz="2025" b="0">
-                <a:solidFill>
-                  <a:srgbClr val="E6EAF2"/>
-                </a:solidFill>
-                <a:latin typeface="나눔고딕코딩"/>
-                <a:ea typeface="나눔고딕코딩"/>
-                <a:cs typeface="나눔고딕코딩"/>
-              </a:rPr>
-              <a:t>(성능·테스트) (</a:t>
-            </a:r>
-            <a:r>
-              <a:rPr sz="2025" b="0">
-                <a:solidFill>
-                  <a:srgbClr val="E6EAF2"/>
-                </a:solidFill>
-                <a:latin typeface="나눔고딕코딩"/>
-                <a:ea typeface="나눔고딕코딩"/>
-                <a:cs typeface="나눔고딕코딩"/>
-              </a:rPr>
-              <a:t>Node</a:t>
-            </a:r>
-            <a:r>
-              <a:rPr sz="2025" b="0">
-                <a:solidFill>
-                  <a:srgbClr val="E6EAF2"/>
-                </a:solidFill>
-                <a:latin typeface="나눔고딕코딩"/>
-                <a:ea typeface="나눔고딕코딩"/>
-                <a:cs typeface="나눔고딕코딩"/>
-              </a:rPr>
-              <a:t>.</a:t>
-            </a:r>
-            <a:r>
-              <a:rPr sz="2025" b="0">
-                <a:solidFill>
-                  <a:srgbClr val="E6EAF2"/>
-                </a:solidFill>
-                <a:latin typeface="나눔고딕코딩"/>
-                <a:ea typeface="나눔고딕코딩"/>
-                <a:cs typeface="나눔고딕코딩"/>
-              </a:rPr>
-              <a:t>js</a:t>
-            </a:r>
-            <a:r>
-              <a:rPr sz="2025" b="0">
-                <a:solidFill>
-                  <a:srgbClr val="E6EAF2"/>
-                </a:solidFill>
-                <a:latin typeface="나눔고딕코딩"/>
-                <a:ea typeface="나눔고딕코딩"/>
-                <a:cs typeface="나눔고딕코딩"/>
-              </a:rPr>
-              <a:t>·</a:t>
-            </a:r>
-            <a:r>
-              <a:rPr sz="2025" b="0">
-                <a:solidFill>
-                  <a:srgbClr val="E6EAF2"/>
-                </a:solidFill>
-                <a:latin typeface="나눔고딕코딩"/>
-                <a:ea typeface="나눔고딕코딩"/>
-                <a:cs typeface="나눔고딕코딩"/>
-              </a:rPr>
-              <a:t>DB</a:t>
-            </a:r>
-            <a:r>
-              <a:rPr sz="2025" b="0">
-                <a:solidFill>
-                  <a:srgbClr val="E6EAF2"/>
-                </a:solidFill>
-                <a:latin typeface="나눔고딕코딩"/>
-                <a:ea typeface="나눔고딕코딩"/>
-                <a:cs typeface="나눔고딕코딩"/>
-              </a:rPr>
-              <a:t>)</a:t>
-            </a:r>
-          </a:p>
-        </p:txBody>
-      </p:sp>
+            <a:ext cx="4638675" cy="4976812"/>
+          </a:xfrm>
+          <a:prstGeom prst="rect">
+            <a:avLst/>
+          </a:prstGeom>
+        </p:spPr>
+      </p:pic>
       <p:sp>
         <p:nvSpPr>
           <p:cNvPr id="12" name="Rectangle 11"/>
